--- a/Forum_Soutenance.pptx
+++ b/Forum_Soutenance.pptx
@@ -7420,7 +7420,7 @@
           <a:bodyPr/>
           <a:lstStyle/>
           <a:p>
-            <a:endParaRPr lang="fr-FR"/>
+            <a:endParaRPr lang="fr-FR" dirty="0"/>
           </a:p>
         </p:txBody>
       </p:sp>
@@ -7537,7 +7537,7 @@
                 <a:ea typeface="Calibri" pitchFamily="34" charset="-122"/>
                 <a:cs typeface="Calibri" pitchFamily="34" charset="-120"/>
               </a:rPr>
-              <a:t> ·</a:t>
+              <a:t> </a:t>
             </a:r>
             <a:endParaRPr lang="en-US" sz="1000" dirty="0"/>
           </a:p>
@@ -7680,7 +7680,18 @@
                 <a:ea typeface="Calibri" pitchFamily="34" charset="-122"/>
                 <a:cs typeface="Calibri" pitchFamily="34" charset="-120"/>
               </a:rPr>
-              <a:t>Notifications visuelles · Animations CSS · Dark mode</a:t>
+              <a:t>Notifications visuelles · </a:t>
+            </a:r>
+            <a:r>
+              <a:rPr lang="en-US" sz="1000">
+                <a:solidFill>
+                  <a:srgbClr val="8B949E"/>
+                </a:solidFill>
+                <a:latin typeface="Calibri" pitchFamily="34" charset="0"/>
+                <a:ea typeface="Calibri" pitchFamily="34" charset="-122"/>
+                <a:cs typeface="Calibri" pitchFamily="34" charset="-120"/>
+              </a:rPr>
+              <a:t>Animations CSS</a:t>
             </a:r>
             <a:endParaRPr lang="en-US" sz="1000" dirty="0"/>
           </a:p>

--- a/Forum_Soutenance.pptx
+++ b/Forum_Soutenance.pptx
@@ -290,9 +290,18 @@
           <a:lstStyle/>
           <a:p>
             <a:r>
-              <a:rPr lang="en-US" dirty="0"/>
-              <a:t>Présentation du binôme et du projet. Hugo prend la parole. Durée cible : 30 sec.</a:t>
-            </a:r>
+              <a:rPr lang="fr-FR" dirty="0"/>
+              <a:t>Bonjour à tous, aujourd'hui nous allons vous présenter notre projet Forum, une application web développée en </a:t>
+            </a:r>
+            <a:r>
+              <a:rPr lang="fr-FR" dirty="0" err="1"/>
+              <a:t>Golang</a:t>
+            </a:r>
+            <a:r>
+              <a:rPr lang="fr-FR" dirty="0"/>
+              <a:t>, SQL et HTML/CSS/JS. </a:t>
+            </a:r>
+            <a:endParaRPr lang="en-US" dirty="0"/>
           </a:p>
         </p:txBody>
       </p:sp>
@@ -377,9 +386,28 @@
           <a:lstStyle/>
           <a:p>
             <a:r>
-              <a:rPr lang="en-US" dirty="0"/>
-              <a:t>Slide de transition rapide, 20 sec max. Louis présente le plan.</a:t>
-            </a:r>
+              <a:rPr lang="fr-FR" dirty="0"/>
+              <a:t>Pour cette présentation, nous allons aborder trois grandes parties. </a:t>
+            </a:r>
+          </a:p>
+          <a:p>
+            <a:r>
+              <a:rPr lang="fr-FR" dirty="0"/>
+              <a:t>Dans un premier temps, nous vous présenterons le projet avec les technologies utilisées, l'architecture et le routage. </a:t>
+            </a:r>
+          </a:p>
+          <a:p>
+            <a:r>
+              <a:rPr lang="fr-FR" dirty="0"/>
+              <a:t>Ensuite, nous passerons à une démonstration des fonctionnalités, aussi bien les obligatoires que les bonus. </a:t>
+            </a:r>
+          </a:p>
+          <a:p>
+            <a:r>
+              <a:rPr lang="fr-FR" dirty="0"/>
+              <a:t>Et enfin, nous vous parlerons de notre organisation de travail, avec la répartition des tâches, les difficultés rencontrées et les solutions que nous avons apportées.</a:t>
+            </a:r>
+            <a:endParaRPr lang="en-US" dirty="0"/>
           </a:p>
         </p:txBody>
       </p:sp>
@@ -464,9 +492,36 @@
           <a:lstStyle/>
           <a:p>
             <a:r>
-              <a:rPr lang="en-US" dirty="0"/>
-              <a:t>Hugo présente la stack tech (30 sec). Louis présente le schéma d'architecture (30 sec). Expliquer le flux : navigateur → serveur Go → handlers → SQL.</a:t>
-            </a:r>
+              <a:rPr lang="fr-FR" dirty="0"/>
+              <a:t>Commençons par la stack technique. </a:t>
+            </a:r>
+          </a:p>
+          <a:p>
+            <a:r>
+              <a:rPr lang="fr-FR" dirty="0"/>
+              <a:t>Pour le backend, nous avons choisi Go, plus précisément le package net/http natif, sans </a:t>
+            </a:r>
+            <a:r>
+              <a:rPr lang="fr-FR" dirty="0" err="1"/>
+              <a:t>framework</a:t>
+            </a:r>
+            <a:r>
+              <a:rPr lang="fr-FR" dirty="0"/>
+              <a:t> externe. </a:t>
+            </a:r>
+          </a:p>
+          <a:p>
+            <a:r>
+              <a:rPr lang="fr-FR" dirty="0"/>
+              <a:t>Le frontend est en HTML, CSS et JavaScript pur. La base de données repose sur SQL, gérée via XAMPP. </a:t>
+            </a:r>
+          </a:p>
+          <a:p>
+            <a:r>
+              <a:rPr lang="fr-FR" dirty="0"/>
+              <a:t>Et pour le versioning, nous avons utilisé Git et GitHub tout au long du projet.</a:t>
+            </a:r>
+            <a:endParaRPr lang="en-US" dirty="0"/>
           </a:p>
         </p:txBody>
       </p:sp>
@@ -551,9 +606,74 @@
           <a:lstStyle/>
           <a:p>
             <a:r>
-              <a:rPr lang="en-US" dirty="0"/>
-              <a:t>Louis présente le routage (40 sec). Montrer comment les routes GET/POST structurent l'app. Souligner la cohérence REST-like.</a:t>
-            </a:r>
+              <a:rPr lang="fr-FR" dirty="0"/>
+              <a:t>Passons maintenant au routage de l'application. </a:t>
+            </a:r>
+          </a:p>
+          <a:p>
+            <a:r>
+              <a:rPr lang="fr-FR" dirty="0"/>
+              <a:t>Nous avons défini un ensemble de routes claires pour couvrir toutes les fonctionnalités. </a:t>
+            </a:r>
+          </a:p>
+          <a:p>
+            <a:r>
+              <a:rPr lang="fr-FR" dirty="0"/>
+              <a:t>Un GET sur "/" charge la page d'accueil avec la liste des </a:t>
+            </a:r>
+            <a:r>
+              <a:rPr lang="fr-FR" dirty="0" err="1"/>
+              <a:t>posts</a:t>
+            </a:r>
+            <a:r>
+              <a:rPr lang="fr-FR" dirty="0"/>
+              <a:t>. </a:t>
+            </a:r>
+          </a:p>
+          <a:p>
+            <a:r>
+              <a:rPr lang="fr-FR" dirty="0"/>
+              <a:t>Les routes /</a:t>
+            </a:r>
+            <a:r>
+              <a:rPr lang="fr-FR" dirty="0" err="1"/>
+              <a:t>register</a:t>
+            </a:r>
+            <a:r>
+              <a:rPr lang="fr-FR" dirty="0"/>
+              <a:t> et /login gèrent respectivement l'inscription et la connexion, en GET pour afficher le formulaire, en POST pour traiter les données. </a:t>
+            </a:r>
+          </a:p>
+          <a:p>
+            <a:r>
+              <a:rPr lang="fr-FR" dirty="0"/>
+              <a:t>La route /post/{id} permet d'afficher un post avec ses commentaires, /post/</a:t>
+            </a:r>
+            <a:r>
+              <a:rPr lang="fr-FR" dirty="0" err="1"/>
+              <a:t>create</a:t>
+            </a:r>
+            <a:r>
+              <a:rPr lang="fr-FR" dirty="0"/>
+              <a:t> de créer un nouveau post, /comment/</a:t>
+            </a:r>
+            <a:r>
+              <a:rPr lang="fr-FR" dirty="0" err="1"/>
+              <a:t>add</a:t>
+            </a:r>
+            <a:r>
+              <a:rPr lang="fr-FR" dirty="0"/>
+              <a:t> d'ajouter un commentaire, et enfin /like de gérer les likes et dislikes sur les </a:t>
+            </a:r>
+            <a:r>
+              <a:rPr lang="fr-FR" dirty="0" err="1"/>
+              <a:t>posts</a:t>
+            </a:r>
+            <a:r>
+              <a:rPr lang="fr-FR" dirty="0"/>
+              <a:t> et commentaires.</a:t>
+            </a:r>
+            <a:endParaRPr lang="en-US" dirty="0"/>
           </a:p>
         </p:txBody>
       </p:sp>
@@ -638,9 +758,42 @@
           <a:lstStyle/>
           <a:p>
             <a:r>
-              <a:rPr lang="en-US" dirty="0"/>
-              <a:t>Hugo démarre la démo en direct. Louis commente les fonctionnalités au fur et à mesure. Durée cible : 1 min 30. Naviguer vers localhost:8080.</a:t>
-            </a:r>
+              <a:rPr lang="fr-FR" dirty="0"/>
+              <a:t>Concernant les fonctionnalités obligatoires, nous avons implémenté l'ensemble du cahier des charges. </a:t>
+            </a:r>
+          </a:p>
+          <a:p>
+            <a:r>
+              <a:rPr lang="fr-FR" dirty="0"/>
+              <a:t>L'authentification est complète, avec l'inscription, la connexion, la déconnexion et la gestion des sessions sécurisées. </a:t>
+            </a:r>
+          </a:p>
+          <a:p>
+            <a:r>
+              <a:rPr lang="fr-FR" dirty="0"/>
+              <a:t>Les utilisateurs peuvent créer des </a:t>
+            </a:r>
+            <a:r>
+              <a:rPr lang="fr-FR" dirty="0" err="1"/>
+              <a:t>posts</a:t>
+            </a:r>
+            <a:r>
+              <a:rPr lang="fr-FR" dirty="0"/>
+              <a:t>, les consulter et y répondre avec des commentaires imbriqués. </a:t>
+            </a:r>
+          </a:p>
+          <a:p>
+            <a:r>
+              <a:rPr lang="fr-FR" dirty="0"/>
+              <a:t>Il est également possible de liker ou disliker un post ou un commentaire, avec des compteurs mis à jour dynamiquement. </a:t>
+            </a:r>
+          </a:p>
+          <a:p>
+            <a:r>
+              <a:rPr lang="fr-FR" dirty="0"/>
+              <a:t>On retrouve aussi un système de filtrage par catégorie, une gestion des rôles en trois niveaux — utilisateur, modérateur et admin — et une interface responsive qui fonctionne aussi bien sur desktop que sur mobile.</a:t>
+            </a:r>
+            <a:endParaRPr lang="en-US" dirty="0"/>
           </a:p>
         </p:txBody>
       </p:sp>
@@ -725,9 +878,42 @@
           <a:lstStyle/>
           <a:p>
             <a:r>
-              <a:rPr lang="en-US" dirty="0"/>
-              <a:t>Louis présente les bonus (30 sec). Insister sur l'effort supplémentaire fourni au-delà du cahier des charges.</a:t>
-            </a:r>
+              <a:rPr lang="fr-FR" dirty="0"/>
+              <a:t>En plus des fonctionnalités obligatoires, nous avons également développé plusieurs bonus. </a:t>
+            </a:r>
+          </a:p>
+          <a:p>
+            <a:r>
+              <a:rPr lang="fr-FR" dirty="0"/>
+              <a:t>Nous avons mis en place un système de modération complet, qui permet de bannir des utilisateurs, de supprimer ou modifier des messages, et de réaliser des actions admin en temps réel. </a:t>
+            </a:r>
+          </a:p>
+          <a:p>
+            <a:r>
+              <a:rPr lang="fr-FR" dirty="0"/>
+              <a:t>Chaque utilisateur dispose d'une page de profil avec l'historique de ses </a:t>
+            </a:r>
+            <a:r>
+              <a:rPr lang="fr-FR" dirty="0" err="1"/>
+              <a:t>posts</a:t>
+            </a:r>
+            <a:r>
+              <a:rPr lang="fr-FR" dirty="0"/>
+              <a:t> et de ses votes. </a:t>
+            </a:r>
+          </a:p>
+          <a:p>
+            <a:r>
+              <a:rPr lang="fr-FR" dirty="0"/>
+              <a:t>Il est aussi possible de publier des images dans le forum et d'avoir une photo de profil. </a:t>
+            </a:r>
+          </a:p>
+          <a:p>
+            <a:r>
+              <a:rPr lang="fr-FR" dirty="0"/>
+              <a:t>Et pour finir, nous avons soigné l'expérience utilisateur avec des notifications visuelles, des animations CSS et un mode sombre.</a:t>
+            </a:r>
+            <a:endParaRPr lang="en-US" dirty="0"/>
           </a:p>
         </p:txBody>
       </p:sp>
@@ -812,9 +998,30 @@
           <a:lstStyle/>
           <a:p>
             <a:r>
-              <a:rPr lang="en-US" dirty="0"/>
-              <a:t>Hugo et Louis présentent chacun leurs contributions (30 sec chacun). Appuyer sur la coordination efficace.</a:t>
-            </a:r>
+              <a:rPr lang="fr-FR" dirty="0"/>
+              <a:t>Pour l'organisation, nous avons réparti le travail équitablement, moitié-moitié. </a:t>
+            </a:r>
+          </a:p>
+          <a:p>
+            <a:r>
+              <a:rPr lang="fr-FR" dirty="0"/>
+              <a:t>De mon côté, j'ai travaillé sur la création et la consultation des topics, la publication de messages, le tri, l'affichage par catégorie, la barre de recherche et la gestion de profil.</a:t>
+            </a:r>
+          </a:p>
+          <a:p>
+            <a:r>
+              <a:rPr lang="fr-FR" dirty="0"/>
+              <a:t> Louis a pris en charge l'inscription, la connexion, la gestion des messages et des topics, les likes et dislikes, la pagination, le </a:t>
+            </a:r>
+            <a:r>
+              <a:rPr lang="fr-FR" dirty="0" err="1"/>
+              <a:t>dashboard</a:t>
+            </a:r>
+            <a:r>
+              <a:rPr lang="fr-FR" dirty="0"/>
+              <a:t> admin et la gestion des images.</a:t>
+            </a:r>
+            <a:endParaRPr lang="en-US" dirty="0"/>
           </a:p>
         </p:txBody>
       </p:sp>
@@ -899,9 +1106,51 @@
           <a:lstStyle/>
           <a:p>
             <a:r>
-              <a:rPr lang="en-US" dirty="0"/>
-              <a:t>Louis présente les difficultés (20 sec). Hugo présente les solutions (20 sec). Montrer la maturité et la capacité d'adaptation de l'équipe.</a:t>
-            </a:r>
+              <a:rPr lang="fr-FR" dirty="0"/>
+              <a:t>Comme dans tout projet en binôme, nous avons rencontré quelques difficultés. </a:t>
+            </a:r>
+          </a:p>
+          <a:p>
+            <a:r>
+              <a:rPr lang="fr-FR" dirty="0"/>
+              <a:t>La première, c'étaient les conflits Git. </a:t>
+            </a:r>
+          </a:p>
+          <a:p>
+            <a:r>
+              <a:rPr lang="fr-FR" dirty="0"/>
+              <a:t>En travaillant en parallèle sur les mêmes fichiers, on se retrouvait régulièrement avec des conflits au moment du merge. </a:t>
+            </a:r>
+          </a:p>
+          <a:p>
+            <a:r>
+              <a:rPr lang="fr-FR" dirty="0"/>
+              <a:t>Pour y remédier, on a mis en place des réunions de merge planifiées, une convention de nommage des branches en </a:t>
+            </a:r>
+            <a:r>
+              <a:rPr lang="fr-FR" dirty="0" err="1"/>
+              <a:t>feature</a:t>
+            </a:r>
+            <a:r>
+              <a:rPr lang="fr-FR" dirty="0"/>
+              <a:t>/, et des revues de code croisées.</a:t>
+            </a:r>
+          </a:p>
+          <a:p>
+            <a:endParaRPr lang="fr-FR" dirty="0"/>
+          </a:p>
+          <a:p>
+            <a:r>
+              <a:rPr lang="fr-FR" dirty="0"/>
+              <a:t> La deuxième difficulté concernait la base de données : chacun avait sa propre base locale, ce qui entraînait des désynchronisations de schéma.</a:t>
+            </a:r>
+          </a:p>
+          <a:p>
+            <a:r>
+              <a:rPr lang="fr-FR" dirty="0"/>
+              <a:t> On a résolu ça en migrant vers une base commune sur XAMPP partagé, et en versionnant des scripts SQL d'initialisation.</a:t>
+            </a:r>
+            <a:endParaRPr lang="en-US" dirty="0"/>
           </a:p>
         </p:txBody>
       </p:sp>
@@ -986,9 +1235,40 @@
           <a:lstStyle/>
           <a:p>
             <a:r>
-              <a:rPr lang="en-US" dirty="0"/>
-              <a:t>Hugo et Louis en chœur pour le 'merci'. Rester sur cette slide pour les questions. Durée totale visée : 5 minutes pile.</a:t>
-            </a:r>
+              <a:rPr lang="fr-FR" dirty="0"/>
+              <a:t>Voilà, nous arrivons à la fin de notre présentation. </a:t>
+            </a:r>
+          </a:p>
+          <a:p>
+            <a:r>
+              <a:rPr lang="fr-FR" dirty="0"/>
+              <a:t>Ce projet nous a permis de mettre en pratique Go pour le backend, SQL pour la base de données, HTML/CSS/JS pour le frontend, et Git pour le travail collaboratif.</a:t>
+            </a:r>
+          </a:p>
+          <a:p>
+            <a:r>
+              <a:rPr lang="fr-FR"/>
+              <a:t>Nous </a:t>
+            </a:r>
+            <a:r>
+              <a:rPr lang="fr-FR" dirty="0"/>
+              <a:t>avons aussi eu la satisfaction d'aller au-delà du cahier des charges en implémentant plusieurs fonctionnalités bonus</a:t>
+            </a:r>
+            <a:r>
+              <a:rPr lang="fr-FR"/>
+              <a:t>. </a:t>
+            </a:r>
+          </a:p>
+          <a:p>
+            <a:r>
+              <a:rPr lang="fr-FR"/>
+              <a:t>Nous </a:t>
+            </a:r>
+            <a:r>
+              <a:rPr lang="fr-FR" dirty="0"/>
+              <a:t>vous remercions pour votre attention, et nous sommes maintenant disponibles pour répondre à vos questions.</a:t>
+            </a:r>
+            <a:endParaRPr lang="en-US" dirty="0"/>
           </a:p>
         </p:txBody>
       </p:sp>
